--- a/docs/SANKHYA-deck.pptx
+++ b/docs/SANKHYA-deck.pptx
@@ -3896,7 +3896,7 @@
                   <a:srgbClr val="555555"/>
                 </a:solidFill>
               </a:rPr>
-              <a:t>Declined instances: stress set 15 of 126 declined (0 wrong); Maros-Meszaros 106 of 138 optimal; safe bounds, 18 of 93 optimal answers with no finite bound, and they say so.</a:t>
+              <a:t>Declined instances: stress set 15 of 126 declined (0 wrong); Maros-Meszaros 109 of 138 optimal; safe bounds, 18 of 93 optimal answers with no finite bound, and they say so.</a:t>
             </a:r>
           </a:p>
           <a:p>
@@ -8996,7 +8996,7 @@
                   <a:srgbClr val="555555"/>
                 </a:solidFill>
               </a:rPr>
-              <a:t>Source: bench/results/head-to-head-maros-meszaros-1860864.csv (1860864); bench/results/maros-meszaros-9094e1c.csv (9094e1c); bench/results/miplib-ad57c03.csv (ad57c03)</a:t>
+              <a:t>Source: bench/results/head-to-head-maros-meszaros-1860864.csv (1860864); bench/results/maros-meszaros-847042e3.csv (847042e3); bench/results/miplib-ad57c03.csv (ad57c03)</a:t>
             </a:r>
           </a:p>
         </p:txBody>
@@ -9885,7 +9885,7 @@
                   <a:srgbClr val="555555"/>
                 </a:solidFill>
               </a:rPr>
-              <a:t>Alone, on the laptop: 106 of 138 at the published objective, 0 optimal answers rejected (bench/results/maros-meszaros-9094e1c.csv).</a:t>
+              <a:t>Alone, on the laptop: 108 of 138 at the published objective, 0 optimal answers rejected (bench/results/maros-meszaros-847042e3.csv).</a:t>
             </a:r>
           </a:p>
         </p:txBody>

--- a/docs/SANKHYA-deck.pptx
+++ b/docs/SANKHYA-deck.pptx
@@ -3813,7 +3813,7 @@
                   <a:srgbClr val="555555"/>
                 </a:solidFill>
               </a:rPr>
-              <a:t>Source: bench/results/head-to-head-netlib-5e490ef.csv; bench/results/head-to-head-kennington-1860864.csv; bench/results/mittelmann-72123ff.csv; bench/results/miplib-ad57c03.csv; bench/results/stress-d32b3847.csv; bench/results/certified-gap-netlib-full-0134c92.csv; docs/NEGATIVE-RESULTS.md</a:t>
+              <a:t>Source: bench/results/head-to-head-netlib-5e490ef.csv; bench/results/head-to-head-kennington-1860864.csv; bench/results/mittelmann-72123ff.csv; bench/results/miplib-ad57c03.csv; bench/results/stress-d32b3847.csv; bench/results/certified-gap-netlib-full-44418e2b.csv; docs/NEGATIVE-RESULTS.md</a:t>
             </a:r>
           </a:p>
         </p:txBody>
@@ -3896,7 +3896,7 @@
                   <a:srgbClr val="555555"/>
                 </a:solidFill>
               </a:rPr>
-              <a:t>Declined instances: stress set 15 of 126 declined (0 wrong); Maros-Meszaros 106 of 138 optimal; safe bounds, 18 of 93 optimal answers with no finite bound, and they say so.</a:t>
+              <a:t>Declined instances: stress set 15 of 126 declined (0 wrong); Maros-Meszaros 106 of 138 optimal; safe bounds, 3 of 94 optimal answers with no finite bound, and they say so.</a:t>
             </a:r>
           </a:p>
           <a:p>
@@ -6548,7 +6548,7 @@
                   <a:srgbClr val="555555"/>
                 </a:solidFill>
               </a:rPr>
-              <a:t>Source: bench/results/netlib-full-9094e1c.csv, bench/results/netlib-infeasible-5a39fb2.csv, bench/results/certified-gap-netlib-full-0134c92.csv, bench/results/exact-sensitivity-60455ce.csv, bench/results/stress-d32b3847.csv</a:t>
+              <a:t>Source: bench/results/netlib-full-9094e1c.csv, bench/results/netlib-infeasible-5a39fb2.csv, bench/results/certified-gap-netlib-full-44418e2b.csv, bench/results/exact-sensitivity-60455ce.csv, bench/results/stress-d32b3847.csv</a:t>
             </a:r>
           </a:p>
         </p:txBody>
@@ -6954,7 +6954,7 @@
                             <a:srgbClr val="555555"/>
                           </a:solidFill>
                         </a:rPr>
-                        <a:t>73 of 93</a:t>
+                        <a:t>90 of 94</a:t>
                       </a:r>
                     </a:p>
                   </a:txBody>
@@ -6975,7 +6975,7 @@
                             <a:srgbClr val="555555"/>
                           </a:solidFill>
                         </a:rPr>
-                        <a:t>bench/results/certified-gap-netlib-full-0134c92.csv</a:t>
+                        <a:t>bench/results/certified-gap-netlib-full-44418e2b.csv</a:t>
                       </a:r>
                     </a:p>
                   </a:txBody>
@@ -6996,7 +6996,7 @@
                             <a:srgbClr val="555555"/>
                           </a:solidFill>
                         </a:rPr>
-                        <a:t>0134c92</a:t>
+                        <a:t>44418e2b</a:t>
                       </a:r>
                     </a:p>
                   </a:txBody>

--- a/docs/SANKHYA-deck.pptx
+++ b/docs/SANKHYA-deck.pptx
@@ -3896,7 +3896,7 @@
                   <a:srgbClr val="555555"/>
                 </a:solidFill>
               </a:rPr>
-              <a:t>Declined instances: stress set 15 of 126 declined (0 wrong); Maros-Meszaros 106 of 138 optimal; safe bounds, 3 of 94 optimal answers with no finite bound, and they say so.</a:t>
+              <a:t>Declined instances: stress set 15 of 126 declined (0 wrong); Maros-Meszaros 109 of 138 optimal; safe bounds, 3 of 94 optimal answers with no finite bound, and they say so.</a:t>
             </a:r>
           </a:p>
           <a:p>
@@ -8996,7 +8996,7 @@
                   <a:srgbClr val="555555"/>
                 </a:solidFill>
               </a:rPr>
-              <a:t>Source: bench/results/head-to-head-maros-meszaros-1860864.csv (1860864); bench/results/maros-meszaros-9094e1c.csv (9094e1c); bench/results/miplib-ad57c03.csv (ad57c03)</a:t>
+              <a:t>Source: bench/results/head-to-head-maros-meszaros-1860864.csv (1860864); bench/results/maros-meszaros-847042e3.csv (847042e3); bench/results/miplib-ad57c03.csv (ad57c03)</a:t>
             </a:r>
           </a:p>
         </p:txBody>
@@ -9885,7 +9885,7 @@
                   <a:srgbClr val="555555"/>
                 </a:solidFill>
               </a:rPr>
-              <a:t>Alone, on the laptop: 106 of 138 at the published objective, 0 optimal answers rejected (bench/results/maros-meszaros-9094e1c.csv).</a:t>
+              <a:t>Alone, on the laptop: 108 of 138 at the published objective, 0 optimal answers rejected (bench/results/maros-meszaros-847042e3.csv).</a:t>
             </a:r>
           </a:p>
         </p:txBody>

--- a/docs/SANKHYA-deck.pptx
+++ b/docs/SANKHYA-deck.pptx
@@ -3896,7 +3896,7 @@
                   <a:srgbClr val="555555"/>
                 </a:solidFill>
               </a:rPr>
-              <a:t>Declined instances: stress set 15 of 126 declined (0 wrong); Maros-Meszaros 109 of 138 optimal; safe bounds, 18 of 93 optimal answers with no finite bound, and they say so.</a:t>
+              <a:t>Declined instances: stress set 15 of 126 declined (0 wrong); Maros-Meszaros 114 of 138 optimal; safe bounds, 18 of 93 optimal answers with no finite bound, and they say so.</a:t>
             </a:r>
           </a:p>
           <a:p>
@@ -8996,7 +8996,7 @@
                   <a:srgbClr val="555555"/>
                 </a:solidFill>
               </a:rPr>
-              <a:t>Source: bench/results/head-to-head-maros-meszaros-1860864.csv (1860864); bench/results/maros-meszaros-847042e3.csv (847042e3); bench/results/miplib-ad57c03.csv (ad57c03)</a:t>
+              <a:t>Source: bench/results/head-to-head-maros-meszaros-1860864.csv (1860864); bench/results/maros-meszaros-2a3e303d.csv (2a3e303d); bench/results/miplib-ad57c03.csv (ad57c03)</a:t>
             </a:r>
           </a:p>
         </p:txBody>
@@ -9885,7 +9885,7 @@
                   <a:srgbClr val="555555"/>
                 </a:solidFill>
               </a:rPr>
-              <a:t>Alone, on the laptop: 108 of 138 at the published objective, 0 optimal answers rejected (bench/results/maros-meszaros-847042e3.csv).</a:t>
+              <a:t>Alone, on the laptop: 112 of 138 at the published objective, 0 optimal answers rejected (bench/results/maros-meszaros-2a3e303d.csv).</a:t>
             </a:r>
           </a:p>
         </p:txBody>

--- a/docs/SANKHYA-deck.pptx
+++ b/docs/SANKHYA-deck.pptx
@@ -3813,7 +3813,7 @@
                   <a:srgbClr val="555555"/>
                 </a:solidFill>
               </a:rPr>
-              <a:t>Source: bench/results/head-to-head-netlib-5e490ef.csv; bench/results/head-to-head-kennington-1860864.csv; bench/results/mittelmann-72123ff.csv; bench/results/miplib-ad57c03.csv; bench/results/stress-d32b3847.csv; bench/results/certified-gap-netlib-full-44418e2b.csv; docs/NEGATIVE-RESULTS.md</a:t>
+              <a:t>Source: bench/results/head-to-head-netlib-5e490ef.csv; bench/results/head-to-head-kennington-1860864.csv; bench/results/mittelmann-72123ff.csv; bench/results/miplib-ad57c03.csv; bench/results/stress-d32b3847.csv; bench/results/certified-gap-netlib-full-0134c92.csv; docs/NEGATIVE-RESULTS.md</a:t>
             </a:r>
           </a:p>
         </p:txBody>
@@ -3896,7 +3896,7 @@
                   <a:srgbClr val="555555"/>
                 </a:solidFill>
               </a:rPr>
-              <a:t>Declined instances: stress set 15 of 126 declined (0 wrong); Maros-Meszaros 109 of 138 optimal; safe bounds, 3 of 94 optimal answers with no finite bound, and they say so.</a:t>
+              <a:t>Declined instances: stress set 15 of 126 declined (0 wrong); Maros-Meszaros 109 of 138 optimal; safe bounds, 18 of 93 optimal answers with no finite bound, and they say so.</a:t>
             </a:r>
           </a:p>
           <a:p>
@@ -6548,7 +6548,7 @@
                   <a:srgbClr val="555555"/>
                 </a:solidFill>
               </a:rPr>
-              <a:t>Source: bench/results/netlib-full-9094e1c.csv, bench/results/netlib-infeasible-5a39fb2.csv, bench/results/certified-gap-netlib-full-44418e2b.csv, bench/results/exact-sensitivity-60455ce.csv, bench/results/stress-d32b3847.csv</a:t>
+              <a:t>Source: bench/results/netlib-full-9094e1c.csv, bench/results/netlib-infeasible-5a39fb2.csv, bench/results/certified-gap-netlib-full-0134c92.csv, bench/results/exact-sensitivity-60455ce.csv, bench/results/stress-d32b3847.csv</a:t>
             </a:r>
           </a:p>
         </p:txBody>
@@ -6954,7 +6954,7 @@
                             <a:srgbClr val="555555"/>
                           </a:solidFill>
                         </a:rPr>
-                        <a:t>90 of 94</a:t>
+                        <a:t>73 of 93</a:t>
                       </a:r>
                     </a:p>
                   </a:txBody>
@@ -6975,7 +6975,7 @@
                             <a:srgbClr val="555555"/>
                           </a:solidFill>
                         </a:rPr>
-                        <a:t>bench/results/certified-gap-netlib-full-44418e2b.csv</a:t>
+                        <a:t>bench/results/certified-gap-netlib-full-0134c92.csv</a:t>
                       </a:r>
                     </a:p>
                   </a:txBody>
@@ -6996,7 +6996,7 @@
                             <a:srgbClr val="555555"/>
                           </a:solidFill>
                         </a:rPr>
-                        <a:t>44418e2b</a:t>
+                        <a:t>0134c92</a:t>
                       </a:r>
                     </a:p>
                   </a:txBody>

--- a/docs/SANKHYA-deck.pptx
+++ b/docs/SANKHYA-deck.pptx
@@ -3813,7 +3813,7 @@
                   <a:srgbClr val="555555"/>
                 </a:solidFill>
               </a:rPr>
-              <a:t>Source: bench/results/head-to-head-netlib-5e490ef.csv; bench/results/head-to-head-kennington-1860864.csv; bench/results/mittelmann-72123ff.csv; bench/results/miplib-ad57c03.csv; bench/results/stress-d32b3847.csv; bench/results/certified-gap-netlib-full-0134c92.csv; docs/NEGATIVE-RESULTS.md</a:t>
+              <a:t>Source: bench/results/head-to-head-netlib-5e490ef.csv; bench/results/head-to-head-kennington-1860864.csv; bench/results/mittelmann-72123ff.csv; bench/results/miplib-ad57c03.csv; bench/results/stress-d32b3847.csv; bench/results/certified-gap-netlib-full-736a1106.csv; docs/NEGATIVE-RESULTS.md</a:t>
             </a:r>
           </a:p>
         </p:txBody>
@@ -3896,7 +3896,7 @@
                   <a:srgbClr val="555555"/>
                 </a:solidFill>
               </a:rPr>
-              <a:t>Declined instances: stress set 15 of 126 declined (0 wrong); Maros-Meszaros 109 of 138 optimal; safe bounds, 18 of 93 optimal answers with no finite bound, and they say so.</a:t>
+              <a:t>Declined instances: stress set 15 of 126 declined (0 wrong); Maros-Meszaros 109 of 138 optimal; safe bounds, 3 of 94 optimal answers with no finite bound, and they say so.</a:t>
             </a:r>
           </a:p>
           <a:p>
@@ -6548,7 +6548,7 @@
                   <a:srgbClr val="555555"/>
                 </a:solidFill>
               </a:rPr>
-              <a:t>Source: bench/results/netlib-full-9094e1c.csv, bench/results/netlib-infeasible-5a39fb2.csv, bench/results/certified-gap-netlib-full-0134c92.csv, bench/results/exact-sensitivity-60455ce.csv, bench/results/stress-d32b3847.csv</a:t>
+              <a:t>Source: bench/results/netlib-full-9094e1c.csv, bench/results/netlib-infeasible-5a39fb2.csv, bench/results/certified-gap-netlib-full-736a1106.csv, bench/results/exact-sensitivity-60455ce.csv, bench/results/stress-d32b3847.csv</a:t>
             </a:r>
           </a:p>
         </p:txBody>
@@ -6954,7 +6954,7 @@
                             <a:srgbClr val="555555"/>
                           </a:solidFill>
                         </a:rPr>
-                        <a:t>73 of 93</a:t>
+                        <a:t>90 of 94</a:t>
                       </a:r>
                     </a:p>
                   </a:txBody>
@@ -6975,7 +6975,7 @@
                             <a:srgbClr val="555555"/>
                           </a:solidFill>
                         </a:rPr>
-                        <a:t>bench/results/certified-gap-netlib-full-0134c92.csv</a:t>
+                        <a:t>bench/results/certified-gap-netlib-full-736a1106.csv</a:t>
                       </a:r>
                     </a:p>
                   </a:txBody>
@@ -6996,7 +6996,7 @@
                             <a:srgbClr val="555555"/>
                           </a:solidFill>
                         </a:rPr>
-                        <a:t>0134c92</a:t>
+                        <a:t>736a1106</a:t>
                       </a:r>
                     </a:p>
                   </a:txBody>

--- a/docs/SANKHYA-deck.pptx
+++ b/docs/SANKHYA-deck.pptx
@@ -3813,7 +3813,7 @@
                   <a:srgbClr val="555555"/>
                 </a:solidFill>
               </a:rPr>
-              <a:t>Source: bench/results/head-to-head-netlib-5e490ef.csv; bench/results/head-to-head-kennington-1860864.csv; bench/results/mittelmann-72123ff.csv; bench/results/miplib-ad57c03.csv; bench/results/stress-d32b3847.csv; bench/results/certified-gap-netlib-full-0134c92.csv; docs/NEGATIVE-RESULTS.md</a:t>
+              <a:t>Source: bench/results/head-to-head-netlib-5e490ef.csv; bench/results/head-to-head-kennington-1860864.csv; bench/results/mittelmann-72123ff.csv; bench/results/miplib-ad57c03.csv; bench/results/stress-d32b3847.csv; bench/results/certified-gap-netlib-full-736a1106.csv; docs/NEGATIVE-RESULTS.md</a:t>
             </a:r>
           </a:p>
         </p:txBody>
@@ -3896,7 +3896,7 @@
                   <a:srgbClr val="555555"/>
                 </a:solidFill>
               </a:rPr>
-              <a:t>Declined instances: stress set 15 of 126 declined (0 wrong); Maros-Meszaros 114 of 138 optimal; safe bounds, 18 of 93 optimal answers with no finite bound, and they say so.</a:t>
+              <a:t>Declined instances: stress set 15 of 126 declined (0 wrong); Maros-Meszaros 114 of 138 optimal; safe bounds, 3 of 94 optimal answers with no finite bound, and they say so.</a:t>
             </a:r>
           </a:p>
           <a:p>
@@ -6548,7 +6548,7 @@
                   <a:srgbClr val="555555"/>
                 </a:solidFill>
               </a:rPr>
-              <a:t>Source: bench/results/netlib-full-9094e1c.csv, bench/results/netlib-infeasible-5a39fb2.csv, bench/results/certified-gap-netlib-full-0134c92.csv, bench/results/exact-sensitivity-60455ce.csv, bench/results/stress-d32b3847.csv</a:t>
+              <a:t>Source: bench/results/netlib-full-9094e1c.csv, bench/results/netlib-infeasible-5a39fb2.csv, bench/results/certified-gap-netlib-full-736a1106.csv, bench/results/exact-sensitivity-60455ce.csv, bench/results/stress-d32b3847.csv</a:t>
             </a:r>
           </a:p>
         </p:txBody>
@@ -6954,7 +6954,7 @@
                             <a:srgbClr val="555555"/>
                           </a:solidFill>
                         </a:rPr>
-                        <a:t>73 of 93</a:t>
+                        <a:t>90 of 94</a:t>
                       </a:r>
                     </a:p>
                   </a:txBody>
@@ -6975,7 +6975,7 @@
                             <a:srgbClr val="555555"/>
                           </a:solidFill>
                         </a:rPr>
-                        <a:t>bench/results/certified-gap-netlib-full-0134c92.csv</a:t>
+                        <a:t>bench/results/certified-gap-netlib-full-736a1106.csv</a:t>
                       </a:r>
                     </a:p>
                   </a:txBody>
@@ -6996,7 +6996,7 @@
                             <a:srgbClr val="555555"/>
                           </a:solidFill>
                         </a:rPr>
-                        <a:t>0134c92</a:t>
+                        <a:t>736a1106</a:t>
                       </a:r>
                     </a:p>
                   </a:txBody>

--- a/docs/SANKHYA-deck.pptx
+++ b/docs/SANKHYA-deck.pptx
@@ -3896,7 +3896,7 @@
                   <a:srgbClr val="555555"/>
                 </a:solidFill>
               </a:rPr>
-              <a:t>Declined instances: stress set 15 of 126 declined (0 wrong); Maros-Meszaros 114 of 138 optimal; safe bounds, 3 of 94 optimal answers with no finite bound, and they say so.</a:t>
+              <a:t>Declined instances: stress set 15 of 126 declined (0 wrong); Maros-Meszaros 111 of 138 optimal; safe bounds, 3 of 94 optimal answers with no finite bound, and they say so.</a:t>
             </a:r>
           </a:p>
           <a:p>
@@ -8996,7 +8996,7 @@
                   <a:srgbClr val="555555"/>
                 </a:solidFill>
               </a:rPr>
-              <a:t>Source: bench/results/head-to-head-maros-meszaros-1860864.csv (1860864); bench/results/maros-meszaros-2a3e303d.csv (2a3e303d); bench/results/miplib-ad57c03.csv (ad57c03)</a:t>
+              <a:t>Source: bench/results/head-to-head-maros-meszaros-1860864.csv (1860864); bench/results/maros-meszaros-8103fb18.csv (8103fb18); bench/results/miplib-ad57c03.csv (ad57c03)</a:t>
             </a:r>
           </a:p>
         </p:txBody>
@@ -9885,7 +9885,7 @@
                   <a:srgbClr val="555555"/>
                 </a:solidFill>
               </a:rPr>
-              <a:t>Alone, on the laptop: 112 of 138 at the published objective, 0 optimal answers rejected (bench/results/maros-meszaros-2a3e303d.csv).</a:t>
+              <a:t>Alone, on the laptop: 109 of 138 at the published objective, 0 optimal answers rejected (bench/results/maros-meszaros-8103fb18.csv).</a:t>
             </a:r>
           </a:p>
         </p:txBody>

--- a/docs/SANKHYA-deck.pptx
+++ b/docs/SANKHYA-deck.pptx
@@ -3896,7 +3896,7 @@
                   <a:srgbClr val="555555"/>
                 </a:solidFill>
               </a:rPr>
-              <a:t>Declined instances: stress set 15 of 126 declined (0 wrong); Maros-Meszaros 111 of 138 optimal; safe bounds, 3 of 94 optimal answers with no finite bound, and they say so.</a:t>
+              <a:t>Declined instances: stress set 15 of 126 declined (0 wrong); Maros-Meszaros 116 of 138 optimal; safe bounds, 3 of 94 optimal answers with no finite bound, and they say so.</a:t>
             </a:r>
           </a:p>
           <a:p>
@@ -8996,7 +8996,7 @@
                   <a:srgbClr val="555555"/>
                 </a:solidFill>
               </a:rPr>
-              <a:t>Source: bench/results/head-to-head-maros-meszaros-1860864.csv (1860864); bench/results/maros-meszaros-8103fb18.csv (8103fb18); bench/results/miplib-ad57c03.csv (ad57c03)</a:t>
+              <a:t>Source: bench/results/head-to-head-maros-meszaros-1860864.csv (1860864); bench/results/maros-meszaros-dcbd32eb.csv (dcbd32eb); bench/results/miplib-ad57c03.csv (ad57c03)</a:t>
             </a:r>
           </a:p>
         </p:txBody>
@@ -9885,7 +9885,7 @@
                   <a:srgbClr val="555555"/>
                 </a:solidFill>
               </a:rPr>
-              <a:t>Alone, on the laptop: 109 of 138 at the published objective, 0 optimal answers rejected (bench/results/maros-meszaros-8103fb18.csv).</a:t>
+              <a:t>Alone, on the laptop: 114 of 138 at the published objective, 0 optimal answers rejected (bench/results/maros-meszaros-dcbd32eb.csv).</a:t>
             </a:r>
           </a:p>
         </p:txBody>

--- a/docs/SANKHYA-deck.pptx
+++ b/docs/SANKHYA-deck.pptx
@@ -3813,7 +3813,7 @@
                   <a:srgbClr val="555555"/>
                 </a:solidFill>
               </a:rPr>
-              <a:t>Source: bench/results/head-to-head-netlib-5e490ef.csv; bench/results/head-to-head-kennington-1860864.csv; bench/results/mittelmann-72123ff.csv; bench/results/miplib-ad57c03.csv; bench/results/stress-d32b3847.csv; bench/results/certified-gap-netlib-full-736a1106.csv; docs/NEGATIVE-RESULTS.md</a:t>
+              <a:t>Source: bench/results/head-to-head-netlib-5e490ef.csv; bench/results/head-to-head-kennington-1860864.csv; bench/results/mittelmann-72123ff.csv; bench/results/miplib-ad57c03.csv; bench/results/stress-d32b3847.csv; bench/results/certified-gap-netlib-full-945cb4f.csv; docs/NEGATIVE-RESULTS.md</a:t>
             </a:r>
           </a:p>
         </p:txBody>
@@ -3896,7 +3896,7 @@
                   <a:srgbClr val="555555"/>
                 </a:solidFill>
               </a:rPr>
-              <a:t>Declined instances: stress set 15 of 126 declined (0 wrong); Maros-Meszaros 116 of 138 optimal; safe bounds, 3 of 94 optimal answers with no finite bound, and they say so.</a:t>
+              <a:t>Declined instances: stress set 15 of 126 declined (0 wrong); Maros-Meszaros 116 of 138 optimal; safe bounds, 2 of 94 optimal answers with no finite bound, and they say so.</a:t>
             </a:r>
           </a:p>
           <a:p>
@@ -6548,7 +6548,7 @@
                   <a:srgbClr val="555555"/>
                 </a:solidFill>
               </a:rPr>
-              <a:t>Source: bench/results/netlib-full-9094e1c.csv, bench/results/netlib-infeasible-5a39fb2.csv, bench/results/certified-gap-netlib-full-736a1106.csv, bench/results/exact-sensitivity-60455ce.csv, bench/results/stress-d32b3847.csv</a:t>
+              <a:t>Source: bench/results/netlib-full-945cb4f.csv, bench/results/netlib-infeasible-5a39fb2.csv, bench/results/certified-gap-netlib-full-945cb4f.csv, bench/results/exact-sensitivity-60455ce.csv, bench/results/stress-d32b3847.csv</a:t>
             </a:r>
           </a:p>
         </p:txBody>
@@ -6696,7 +6696,7 @@
                             <a:srgbClr val="555555"/>
                           </a:solidFill>
                         </a:rPr>
-                        <a:t>92 of 92</a:t>
+                        <a:t>94 of 94</a:t>
                       </a:r>
                     </a:p>
                   </a:txBody>
@@ -6717,7 +6717,7 @@
                             <a:srgbClr val="555555"/>
                           </a:solidFill>
                         </a:rPr>
-                        <a:t>bench/results/netlib-full-9094e1c.csv</a:t>
+                        <a:t>bench/results/netlib-full-945cb4f.csv</a:t>
                       </a:r>
                     </a:p>
                   </a:txBody>
@@ -6738,7 +6738,7 @@
                             <a:srgbClr val="555555"/>
                           </a:solidFill>
                         </a:rPr>
-                        <a:t>9094e1c</a:t>
+                        <a:t>945cb4f</a:t>
                       </a:r>
                     </a:p>
                   </a:txBody>
@@ -6782,7 +6782,7 @@
                             <a:srgbClr val="555555"/>
                           </a:solidFill>
                         </a:rPr>
-                        <a:t>90 of 92</a:t>
+                        <a:t>94 of 94</a:t>
                       </a:r>
                     </a:p>
                   </a:txBody>
@@ -6803,7 +6803,7 @@
                             <a:srgbClr val="555555"/>
                           </a:solidFill>
                         </a:rPr>
-                        <a:t>bench/results/netlib-full-9094e1c.csv</a:t>
+                        <a:t>bench/results/netlib-full-945cb4f.csv</a:t>
                       </a:r>
                     </a:p>
                   </a:txBody>
@@ -6824,7 +6824,7 @@
                             <a:srgbClr val="555555"/>
                           </a:solidFill>
                         </a:rPr>
-                        <a:t>9094e1c</a:t>
+                        <a:t>945cb4f</a:t>
                       </a:r>
                     </a:p>
                   </a:txBody>
@@ -6954,7 +6954,7 @@
                             <a:srgbClr val="555555"/>
                           </a:solidFill>
                         </a:rPr>
-                        <a:t>90 of 94</a:t>
+                        <a:t>91 of 94</a:t>
                       </a:r>
                     </a:p>
                   </a:txBody>
@@ -6975,7 +6975,7 @@
                             <a:srgbClr val="555555"/>
                           </a:solidFill>
                         </a:rPr>
-                        <a:t>bench/results/certified-gap-netlib-full-736a1106.csv</a:t>
+                        <a:t>bench/results/certified-gap-netlib-full-945cb4f.csv</a:t>
                       </a:r>
                     </a:p>
                   </a:txBody>
@@ -6996,7 +6996,7 @@
                             <a:srgbClr val="555555"/>
                           </a:solidFill>
                         </a:rPr>
-                        <a:t>736a1106</a:t>
+                        <a:t>945cb4f</a:t>
                       </a:r>
                     </a:p>
                   </a:txBody>

--- a/docs/SANKHYA-deck.pptx
+++ b/docs/SANKHYA-deck.pptx
@@ -3896,7 +3896,7 @@
                   <a:srgbClr val="555555"/>
                 </a:solidFill>
               </a:rPr>
-              <a:t>Declined instances: stress set 15 of 126 declined (0 wrong); Maros-Meszaros 116 of 138 optimal; safe bounds, 2 of 94 optimal answers with no finite bound, and they say so.</a:t>
+              <a:t>Declined instances: stress set 15 of 126 declined (0 wrong); Maros-Meszaros 119 of 138 optimal; safe bounds, 2 of 94 optimal answers with no finite bound, and they say so.</a:t>
             </a:r>
           </a:p>
           <a:p>
@@ -8996,7 +8996,7 @@
                   <a:srgbClr val="555555"/>
                 </a:solidFill>
               </a:rPr>
-              <a:t>Source: bench/results/head-to-head-maros-meszaros-1860864.csv (1860864); bench/results/maros-meszaros-dcbd32eb.csv (dcbd32eb); bench/results/miplib-ad57c03.csv (ad57c03)</a:t>
+              <a:t>Source: bench/results/head-to-head-maros-meszaros-1860864.csv (1860864); bench/results/maros-meszaros-cad720c.csv (cad720c); bench/results/miplib-ad57c03.csv (ad57c03)</a:t>
             </a:r>
           </a:p>
         </p:txBody>
@@ -9885,7 +9885,7 @@
                   <a:srgbClr val="555555"/>
                 </a:solidFill>
               </a:rPr>
-              <a:t>Alone, on the laptop: 114 of 138 at the published objective, 0 optimal answers rejected (bench/results/maros-meszaros-dcbd32eb.csv).</a:t>
+              <a:t>Alone, on the laptop: 117 of 138 at the published objective, 0 optimal answers rejected (bench/results/maros-meszaros-cad720c.csv).</a:t>
             </a:r>
           </a:p>
         </p:txBody>

--- a/docs/SANKHYA-deck.pptx
+++ b/docs/SANKHYA-deck.pptx
@@ -8996,7 +8996,7 @@
                   <a:srgbClr val="555555"/>
                 </a:solidFill>
               </a:rPr>
-              <a:t>Source: bench/results/head-to-head-maros-meszaros-1860864.csv (1860864); bench/results/maros-meszaros-cad720c.csv (cad720c); bench/results/miplib-ad57c03.csv (ad57c03)</a:t>
+              <a:t>Source: bench/results/head-to-head-maros-meszaros-d0eb672.csv (d0eb672); bench/results/maros-meszaros-cad720c.csv (cad720c); bench/results/miplib-ad57c03.csv (ad57c03)</a:t>
             </a:r>
           </a:p>
         </p:txBody>
@@ -9049,7 +9049,7 @@
         </p:nvGraphicFramePr>
         <p:xfrm>
           <a:off x="457200" y="1645920"/>
-          <a:ext cx="6858000" cy="1920240"/>
+          <a:ext cx="6858000" cy="3200400"/>
         </p:xfrm>
         <a:graphic>
           <a:graphicData uri="http://schemas.openxmlformats.org/drawingml/2006/table">
@@ -9247,7 +9247,7 @@
                             <a:srgbClr val="555555"/>
                           </a:solidFill>
                         </a:rPr>
-                        <a:t>107</a:t>
+                        <a:t>119</a:t>
                       </a:r>
                     </a:p>
                   </a:txBody>
@@ -9268,7 +9268,7 @@
                             <a:srgbClr val="555555"/>
                           </a:solidFill>
                         </a:rPr>
-                        <a:t>106</a:t>
+                        <a:t>117</a:t>
                       </a:r>
                     </a:p>
                   </a:txBody>
@@ -9289,7 +9289,7 @@
                             <a:srgbClr val="555555"/>
                           </a:solidFill>
                         </a:rPr>
-                        <a:t>107</a:t>
+                        <a:t>119</a:t>
                       </a:r>
                     </a:p>
                   </a:txBody>
@@ -9310,7 +9310,7 @@
                             <a:srgbClr val="555555"/>
                           </a:solidFill>
                         </a:rPr>
-                        <a:t>6.437 s</a:t>
+                        <a:t>4.066 s</a:t>
                       </a:r>
                     </a:p>
                   </a:txBody>
@@ -9375,7 +9375,7 @@
                             <a:srgbClr val="555555"/>
                           </a:solidFill>
                         </a:rPr>
-                        <a:t>105</a:t>
+                        <a:t>102</a:t>
                       </a:r>
                     </a:p>
                   </a:txBody>
@@ -9396,7 +9396,7 @@
                             <a:srgbClr val="555555"/>
                           </a:solidFill>
                         </a:rPr>
-                        <a:t>99</a:t>
+                        <a:t>96</a:t>
                       </a:r>
                     </a:p>
                   </a:txBody>
@@ -9417,7 +9417,7 @@
                             <a:srgbClr val="555555"/>
                           </a:solidFill>
                         </a:rPr>
-                        <a:t>32</a:t>
+                        <a:t>31</a:t>
                       </a:r>
                     </a:p>
                   </a:txBody>
@@ -9438,7 +9438,7 @@
                             <a:srgbClr val="555555"/>
                           </a:solidFill>
                         </a:rPr>
-                        <a:t>35.781 s</a:t>
+                        <a:t>35.808 s</a:t>
                       </a:r>
                     </a:p>
                   </a:txBody>
@@ -9566,7 +9566,7 @@
                             <a:srgbClr val="555555"/>
                           </a:solidFill>
                         </a:rPr>
-                        <a:t>27.436 s</a:t>
+                        <a:t>26.584 s</a:t>
                       </a:r>
                     </a:p>
                   </a:txBody>
@@ -9631,7 +9631,7 @@
                             <a:srgbClr val="555555"/>
                           </a:solidFill>
                         </a:rPr>
-                        <a:t>127</a:t>
+                        <a:t>129</a:t>
                       </a:r>
                     </a:p>
                   </a:txBody>
@@ -9652,7 +9652,7 @@
                             <a:srgbClr val="555555"/>
                           </a:solidFill>
                         </a:rPr>
-                        <a:t>113</a:t>
+                        <a:t>115</a:t>
                       </a:r>
                     </a:p>
                   </a:txBody>
@@ -9673,7 +9673,7 @@
                             <a:srgbClr val="555555"/>
                           </a:solidFill>
                         </a:rPr>
-                        <a:t>62</a:t>
+                        <a:t>64</a:t>
                       </a:r>
                     </a:p>
                   </a:txBody>
@@ -9694,7 +9694,7 @@
                             <a:srgbClr val="555555"/>
                           </a:solidFill>
                         </a:rPr>
-                        <a:t>20.974 s</a:t>
+                        <a:t>20.001 s</a:t>
                       </a:r>
                     </a:p>
                   </a:txBody>
@@ -9823,6 +9823,518 @@
                           </a:solidFill>
                         </a:rPr>
                         <a:t>-</a:t>
+                      </a:r>
+                    </a:p>
+                  </a:txBody>
+                  <a:tcPr>
+                    <a:solidFill>
+                      <a:srgbClr val="FFFFFF"/>
+                    </a:solidFill>
+                  </a:tcPr>
+                </a:tc>
+              </a:tr>
+              <a:tr h="320040">
+                <a:tc>
+                  <a:txBody>
+                    <a:bodyPr/>
+                    <a:lstStyle/>
+                    <a:p>
+                      <a:r>
+                        <a:rPr sz="1200" b="0">
+                          <a:solidFill>
+                            <a:srgbClr val="555555"/>
+                          </a:solidFill>
+                        </a:rPr>
+                        <a:t>OSQP</a:t>
+                      </a:r>
+                    </a:p>
+                  </a:txBody>
+                  <a:tcPr>
+                    <a:solidFill>
+                      <a:srgbClr val="F2F4F7"/>
+                    </a:solidFill>
+                  </a:tcPr>
+                </a:tc>
+                <a:tc>
+                  <a:txBody>
+                    <a:bodyPr/>
+                    <a:lstStyle/>
+                    <a:p>
+                      <a:r>
+                        <a:rPr sz="1200" b="0">
+                          <a:solidFill>
+                            <a:srgbClr val="555555"/>
+                          </a:solidFill>
+                        </a:rPr>
+                        <a:t>138</a:t>
+                      </a:r>
+                    </a:p>
+                  </a:txBody>
+                  <a:tcPr>
+                    <a:solidFill>
+                      <a:srgbClr val="F2F4F7"/>
+                    </a:solidFill>
+                  </a:tcPr>
+                </a:tc>
+                <a:tc>
+                  <a:txBody>
+                    <a:bodyPr/>
+                    <a:lstStyle/>
+                    <a:p>
+                      <a:r>
+                        <a:rPr sz="1200" b="0">
+                          <a:solidFill>
+                            <a:srgbClr val="555555"/>
+                          </a:solidFill>
+                        </a:rPr>
+                        <a:t>65</a:t>
+                      </a:r>
+                    </a:p>
+                  </a:txBody>
+                  <a:tcPr>
+                    <a:solidFill>
+                      <a:srgbClr val="F2F4F7"/>
+                    </a:solidFill>
+                  </a:tcPr>
+                </a:tc>
+                <a:tc>
+                  <a:txBody>
+                    <a:bodyPr/>
+                    <a:lstStyle/>
+                    <a:p>
+                      <a:r>
+                        <a:rPr sz="1200" b="0">
+                          <a:solidFill>
+                            <a:srgbClr val="555555"/>
+                          </a:solidFill>
+                        </a:rPr>
+                        <a:t>61</a:t>
+                      </a:r>
+                    </a:p>
+                  </a:txBody>
+                  <a:tcPr>
+                    <a:solidFill>
+                      <a:srgbClr val="F2F4F7"/>
+                    </a:solidFill>
+                  </a:tcPr>
+                </a:tc>
+                <a:tc>
+                  <a:txBody>
+                    <a:bodyPr/>
+                    <a:lstStyle/>
+                    <a:p>
+                      <a:r>
+                        <a:rPr sz="1200" b="0">
+                          <a:solidFill>
+                            <a:srgbClr val="555555"/>
+                          </a:solidFill>
+                        </a:rPr>
+                        <a:t>48</a:t>
+                      </a:r>
+                    </a:p>
+                  </a:txBody>
+                  <a:tcPr>
+                    <a:solidFill>
+                      <a:srgbClr val="F2F4F7"/>
+                    </a:solidFill>
+                  </a:tcPr>
+                </a:tc>
+                <a:tc>
+                  <a:txBody>
+                    <a:bodyPr/>
+                    <a:lstStyle/>
+                    <a:p>
+                      <a:r>
+                        <a:rPr sz="1200" b="0">
+                          <a:solidFill>
+                            <a:srgbClr val="555555"/>
+                          </a:solidFill>
+                        </a:rPr>
+                        <a:t>26.650 s</a:t>
+                      </a:r>
+                    </a:p>
+                  </a:txBody>
+                  <a:tcPr>
+                    <a:solidFill>
+                      <a:srgbClr val="F2F4F7"/>
+                    </a:solidFill>
+                  </a:tcPr>
+                </a:tc>
+              </a:tr>
+              <a:tr h="320040">
+                <a:tc>
+                  <a:txBody>
+                    <a:bodyPr/>
+                    <a:lstStyle/>
+                    <a:p>
+                      <a:r>
+                        <a:rPr sz="1200" b="0">
+                          <a:solidFill>
+                            <a:srgbClr val="555555"/>
+                          </a:solidFill>
+                        </a:rPr>
+                        <a:t>Clarabel</a:t>
+                      </a:r>
+                    </a:p>
+                  </a:txBody>
+                  <a:tcPr>
+                    <a:solidFill>
+                      <a:srgbClr val="FFFFFF"/>
+                    </a:solidFill>
+                  </a:tcPr>
+                </a:tc>
+                <a:tc>
+                  <a:txBody>
+                    <a:bodyPr/>
+                    <a:lstStyle/>
+                    <a:p>
+                      <a:r>
+                        <a:rPr sz="1200" b="0">
+                          <a:solidFill>
+                            <a:srgbClr val="555555"/>
+                          </a:solidFill>
+                        </a:rPr>
+                        <a:t>138</a:t>
+                      </a:r>
+                    </a:p>
+                  </a:txBody>
+                  <a:tcPr>
+                    <a:solidFill>
+                      <a:srgbClr val="FFFFFF"/>
+                    </a:solidFill>
+                  </a:tcPr>
+                </a:tc>
+                <a:tc>
+                  <a:txBody>
+                    <a:bodyPr/>
+                    <a:lstStyle/>
+                    <a:p>
+                      <a:r>
+                        <a:rPr sz="1200" b="0">
+                          <a:solidFill>
+                            <a:srgbClr val="555555"/>
+                          </a:solidFill>
+                        </a:rPr>
+                        <a:t>132</a:t>
+                      </a:r>
+                    </a:p>
+                  </a:txBody>
+                  <a:tcPr>
+                    <a:solidFill>
+                      <a:srgbClr val="FFFFFF"/>
+                    </a:solidFill>
+                  </a:tcPr>
+                </a:tc>
+                <a:tc>
+                  <a:txBody>
+                    <a:bodyPr/>
+                    <a:lstStyle/>
+                    <a:p>
+                      <a:r>
+                        <a:rPr sz="1200" b="0">
+                          <a:solidFill>
+                            <a:srgbClr val="555555"/>
+                          </a:solidFill>
+                        </a:rPr>
+                        <a:t>105</a:t>
+                      </a:r>
+                    </a:p>
+                  </a:txBody>
+                  <a:tcPr>
+                    <a:solidFill>
+                      <a:srgbClr val="FFFFFF"/>
+                    </a:solidFill>
+                  </a:tcPr>
+                </a:tc>
+                <a:tc>
+                  <a:txBody>
+                    <a:bodyPr/>
+                    <a:lstStyle/>
+                    <a:p>
+                      <a:r>
+                        <a:rPr sz="1200" b="0">
+                          <a:solidFill>
+                            <a:srgbClr val="555555"/>
+                          </a:solidFill>
+                        </a:rPr>
+                        <a:t>107</a:t>
+                      </a:r>
+                    </a:p>
+                  </a:txBody>
+                  <a:tcPr>
+                    <a:solidFill>
+                      <a:srgbClr val="FFFFFF"/>
+                    </a:solidFill>
+                  </a:tcPr>
+                </a:tc>
+                <a:tc>
+                  <a:txBody>
+                    <a:bodyPr/>
+                    <a:lstStyle/>
+                    <a:p>
+                      <a:r>
+                        <a:rPr sz="1200" b="0">
+                          <a:solidFill>
+                            <a:srgbClr val="555555"/>
+                          </a:solidFill>
+                        </a:rPr>
+                        <a:t>10.062 s</a:t>
+                      </a:r>
+                    </a:p>
+                  </a:txBody>
+                  <a:tcPr>
+                    <a:solidFill>
+                      <a:srgbClr val="FFFFFF"/>
+                    </a:solidFill>
+                  </a:tcPr>
+                </a:tc>
+              </a:tr>
+              <a:tr h="320040">
+                <a:tc>
+                  <a:txBody>
+                    <a:bodyPr/>
+                    <a:lstStyle/>
+                    <a:p>
+                      <a:r>
+                        <a:rPr sz="1200" b="0">
+                          <a:solidFill>
+                            <a:srgbClr val="555555"/>
+                          </a:solidFill>
+                        </a:rPr>
+                        <a:t>PIQP</a:t>
+                      </a:r>
+                    </a:p>
+                  </a:txBody>
+                  <a:tcPr>
+                    <a:solidFill>
+                      <a:srgbClr val="F2F4F7"/>
+                    </a:solidFill>
+                  </a:tcPr>
+                </a:tc>
+                <a:tc>
+                  <a:txBody>
+                    <a:bodyPr/>
+                    <a:lstStyle/>
+                    <a:p>
+                      <a:r>
+                        <a:rPr sz="1200" b="0">
+                          <a:solidFill>
+                            <a:srgbClr val="555555"/>
+                          </a:solidFill>
+                        </a:rPr>
+                        <a:t>138</a:t>
+                      </a:r>
+                    </a:p>
+                  </a:txBody>
+                  <a:tcPr>
+                    <a:solidFill>
+                      <a:srgbClr val="F2F4F7"/>
+                    </a:solidFill>
+                  </a:tcPr>
+                </a:tc>
+                <a:tc>
+                  <a:txBody>
+                    <a:bodyPr/>
+                    <a:lstStyle/>
+                    <a:p>
+                      <a:r>
+                        <a:rPr sz="1200" b="0">
+                          <a:solidFill>
+                            <a:srgbClr val="555555"/>
+                          </a:solidFill>
+                        </a:rPr>
+                        <a:t>137</a:t>
+                      </a:r>
+                    </a:p>
+                  </a:txBody>
+                  <a:tcPr>
+                    <a:solidFill>
+                      <a:srgbClr val="F2F4F7"/>
+                    </a:solidFill>
+                  </a:tcPr>
+                </a:tc>
+                <a:tc>
+                  <a:txBody>
+                    <a:bodyPr/>
+                    <a:lstStyle/>
+                    <a:p>
+                      <a:r>
+                        <a:rPr sz="1200" b="0">
+                          <a:solidFill>
+                            <a:srgbClr val="555555"/>
+                          </a:solidFill>
+                        </a:rPr>
+                        <a:t>130</a:t>
+                      </a:r>
+                    </a:p>
+                  </a:txBody>
+                  <a:tcPr>
+                    <a:solidFill>
+                      <a:srgbClr val="F2F4F7"/>
+                    </a:solidFill>
+                  </a:tcPr>
+                </a:tc>
+                <a:tc>
+                  <a:txBody>
+                    <a:bodyPr/>
+                    <a:lstStyle/>
+                    <a:p>
+                      <a:r>
+                        <a:rPr sz="1200" b="0">
+                          <a:solidFill>
+                            <a:srgbClr val="555555"/>
+                          </a:solidFill>
+                        </a:rPr>
+                        <a:t>135</a:t>
+                      </a:r>
+                    </a:p>
+                  </a:txBody>
+                  <a:tcPr>
+                    <a:solidFill>
+                      <a:srgbClr val="F2F4F7"/>
+                    </a:solidFill>
+                  </a:tcPr>
+                </a:tc>
+                <a:tc>
+                  <a:txBody>
+                    <a:bodyPr/>
+                    <a:lstStyle/>
+                    <a:p>
+                      <a:r>
+                        <a:rPr sz="1200" b="0">
+                          <a:solidFill>
+                            <a:srgbClr val="555555"/>
+                          </a:solidFill>
+                        </a:rPr>
+                        <a:t>1.905 s</a:t>
+                      </a:r>
+                    </a:p>
+                  </a:txBody>
+                  <a:tcPr>
+                    <a:solidFill>
+                      <a:srgbClr val="F2F4F7"/>
+                    </a:solidFill>
+                  </a:tcPr>
+                </a:tc>
+              </a:tr>
+              <a:tr h="320040">
+                <a:tc>
+                  <a:txBody>
+                    <a:bodyPr/>
+                    <a:lstStyle/>
+                    <a:p>
+                      <a:r>
+                        <a:rPr sz="1200" b="0">
+                          <a:solidFill>
+                            <a:srgbClr val="555555"/>
+                          </a:solidFill>
+                        </a:rPr>
+                        <a:t>SCS</a:t>
+                      </a:r>
+                    </a:p>
+                  </a:txBody>
+                  <a:tcPr>
+                    <a:solidFill>
+                      <a:srgbClr val="FFFFFF"/>
+                    </a:solidFill>
+                  </a:tcPr>
+                </a:tc>
+                <a:tc>
+                  <a:txBody>
+                    <a:bodyPr/>
+                    <a:lstStyle/>
+                    <a:p>
+                      <a:r>
+                        <a:rPr sz="1200" b="0">
+                          <a:solidFill>
+                            <a:srgbClr val="555555"/>
+                          </a:solidFill>
+                        </a:rPr>
+                        <a:t>138</a:t>
+                      </a:r>
+                    </a:p>
+                  </a:txBody>
+                  <a:tcPr>
+                    <a:solidFill>
+                      <a:srgbClr val="FFFFFF"/>
+                    </a:solidFill>
+                  </a:tcPr>
+                </a:tc>
+                <a:tc>
+                  <a:txBody>
+                    <a:bodyPr/>
+                    <a:lstStyle/>
+                    <a:p>
+                      <a:r>
+                        <a:rPr sz="1200" b="0">
+                          <a:solidFill>
+                            <a:srgbClr val="555555"/>
+                          </a:solidFill>
+                        </a:rPr>
+                        <a:t>125</a:t>
+                      </a:r>
+                    </a:p>
+                  </a:txBody>
+                  <a:tcPr>
+                    <a:solidFill>
+                      <a:srgbClr val="FFFFFF"/>
+                    </a:solidFill>
+                  </a:tcPr>
+                </a:tc>
+                <a:tc>
+                  <a:txBody>
+                    <a:bodyPr/>
+                    <a:lstStyle/>
+                    <a:p>
+                      <a:r>
+                        <a:rPr sz="1200" b="0">
+                          <a:solidFill>
+                            <a:srgbClr val="555555"/>
+                          </a:solidFill>
+                        </a:rPr>
+                        <a:t>105</a:t>
+                      </a:r>
+                    </a:p>
+                  </a:txBody>
+                  <a:tcPr>
+                    <a:solidFill>
+                      <a:srgbClr val="FFFFFF"/>
+                    </a:solidFill>
+                  </a:tcPr>
+                </a:tc>
+                <a:tc>
+                  <a:txBody>
+                    <a:bodyPr/>
+                    <a:lstStyle/>
+                    <a:p>
+                      <a:r>
+                        <a:rPr sz="1200" b="0">
+                          <a:solidFill>
+                            <a:srgbClr val="555555"/>
+                          </a:solidFill>
+                        </a:rPr>
+                        <a:t>72</a:t>
+                      </a:r>
+                    </a:p>
+                  </a:txBody>
+                  <a:tcPr>
+                    <a:solidFill>
+                      <a:srgbClr val="FFFFFF"/>
+                    </a:solidFill>
+                  </a:tcPr>
+                </a:tc>
+                <a:tc>
+                  <a:txBody>
+                    <a:bodyPr/>
+                    <a:lstStyle/>
+                    <a:p>
+                      <a:r>
+                        <a:rPr sz="1200" b="0">
+                          <a:solidFill>
+                            <a:srgbClr val="555555"/>
+                          </a:solidFill>
+                        </a:rPr>
+                        <a:t>16.235 s</a:t>
                       </a:r>
                     </a:p>
                   </a:txBody>
@@ -9870,7 +10382,7 @@
                   <a:srgbClr val="555555"/>
                 </a:solidFill>
               </a:rPr>
-              <a:t>A rival's optimal status is not taken on trust either: the verifier rejected 163 rival QP answers in this run, and only verified runs count for time. Against HiGHS instance by instance: faster on 82, tie on 22, slower on 5 of 109.</a:t>
+              <a:t>A rival's optimal status is not taken on trust either: the verifier rejected 258 rival QP answers in this run, and only verified runs count for time. Against HiGHS instance by instance: faster on 91, tie on 26, slower on 3 of 120.</a:t>
             </a:r>
           </a:p>
           <a:p>

--- a/docs/SANKHYA-deck.pptx
+++ b/docs/SANKHYA-deck.pptx
@@ -3813,7 +3813,7 @@
                   <a:srgbClr val="555555"/>
                 </a:solidFill>
               </a:rPr>
-              <a:t>Source: bench/results/head-to-head-netlib-5e490ef.csv; bench/results/head-to-head-kennington-1860864.csv; bench/results/mittelmann-72123ff.csv; bench/results/miplib-ad57c03.csv; bench/results/stress-d32b3847.csv; bench/results/certified-gap-netlib-full-945cb4f.csv; docs/NEGATIVE-RESULTS.md</a:t>
+              <a:t>Source: bench/results/head-to-head-netlib-5e490ef.csv; bench/results/head-to-head-kennington-1860864.csv; bench/results/mittelmann-72123ff.csv; bench/results/miplib-ad57c03.csv; bench/results/stress-d32b3847.csv; bench/results/certified-gap-netlib-full-92ef682.csv; docs/NEGATIVE-RESULTS.md</a:t>
             </a:r>
           </a:p>
         </p:txBody>
@@ -3896,7 +3896,7 @@
                   <a:srgbClr val="555555"/>
                 </a:solidFill>
               </a:rPr>
-              <a:t>Declined instances: stress set 15 of 126 declined (0 wrong); Maros-Meszaros 119 of 138 optimal; safe bounds, 2 of 94 optimal answers with no finite bound, and they say so.</a:t>
+              <a:t>Declined instances: stress set 15 of 126 declined (0 wrong); Maros-Meszaros 119 of 138 optimal; safe bounds, 0 of 94 optimal answers with no finite bound, and they say so.</a:t>
             </a:r>
           </a:p>
           <a:p>
@@ -6548,7 +6548,7 @@
                   <a:srgbClr val="555555"/>
                 </a:solidFill>
               </a:rPr>
-              <a:t>Source: bench/results/netlib-full-945cb4f.csv, bench/results/netlib-infeasible-5a39fb2.csv, bench/results/certified-gap-netlib-full-945cb4f.csv, bench/results/exact-sensitivity-60455ce.csv, bench/results/stress-d32b3847.csv</a:t>
+              <a:t>Source: bench/results/netlib-full-945cb4f.csv, bench/results/netlib-infeasible-5a39fb2.csv, bench/results/certified-gap-netlib-full-92ef682.csv, bench/results/exact-sensitivity-60455ce.csv, bench/results/stress-d32b3847.csv</a:t>
             </a:r>
           </a:p>
         </p:txBody>
@@ -6954,7 +6954,7 @@
                             <a:srgbClr val="555555"/>
                           </a:solidFill>
                         </a:rPr>
-                        <a:t>91 of 94</a:t>
+                        <a:t>92 of 94</a:t>
                       </a:r>
                     </a:p>
                   </a:txBody>
@@ -6975,7 +6975,7 @@
                             <a:srgbClr val="555555"/>
                           </a:solidFill>
                         </a:rPr>
-                        <a:t>bench/results/certified-gap-netlib-full-945cb4f.csv</a:t>
+                        <a:t>bench/results/certified-gap-netlib-full-92ef682.csv</a:t>
                       </a:r>
                     </a:p>
                   </a:txBody>
@@ -6996,7 +6996,7 @@
                             <a:srgbClr val="555555"/>
                           </a:solidFill>
                         </a:rPr>
-                        <a:t>945cb4f</a:t>
+                        <a:t>92ef682</a:t>
                       </a:r>
                     </a:p>
                   </a:txBody>
